--- a/Module 2 topic 2/t2-lesson4-comparing-linear-functions.pptx
+++ b/Module 2 topic 2/t2-lesson4-comparing-linear-functions.pptx
@@ -1899,6 +1899,40 @@
           </a:p>
         </p:txBody>
       </p:sp>
+      <p:sp>
+        <p:nvSpPr>
+          <p:cNvPr id="8" name="Slide Number 8"/>
+          <p:cNvSpPr txBox="1"/>
+          <p:nvPr/>
+        </p:nvSpPr>
+        <p:spPr>
+          <a:xfrm>
+            <a:off x="11277295" y="6611112"/>
+            <a:ext cx="685800" cy="201168"/>
+          </a:xfrm>
+          <a:prstGeom prst="rect">
+            <a:avLst/>
+          </a:prstGeom>
+          <a:noFill/>
+        </p:spPr>
+        <p:txBody>
+          <a:bodyPr wrap="none" lIns="0" tIns="0" rIns="0" bIns="0" anchor="b">
+            <a:noAutofit/>
+          </a:bodyPr>
+          <a:lstStyle/>
+          <a:p>
+            <a:pPr algn="r"/>
+            <a:fld id="{5C1A6E0B-3B1F-4D5E-9C7A-2F4B8D6E1A90}" type="slidenum">
+              <a:rPr lang="en-US" sz="1200" dirty="0">
+                <a:solidFill>
+                  <a:srgbClr val="5F6272"/>
+                </a:solidFill>
+              </a:rPr>
+              <a:t>1</a:t>
+            </a:fld>
+          </a:p>
+        </p:txBody>
+      </p:sp>
     </p:spTree>
   </p:cSld>
   <p:clrMapOvr>
@@ -2600,6 +2634,40 @@
               <a:t xml:space="preserve">$20</a:t>
             </a:r>
             <a:endParaRPr lang="en-US" sz="2325" dirty="0"/>
+          </a:p>
+        </p:txBody>
+      </p:sp>
+      <p:sp>
+        <p:nvSpPr>
+          <p:cNvPr id="12" name="Slide Number 12"/>
+          <p:cNvSpPr txBox="1"/>
+          <p:nvPr/>
+        </p:nvSpPr>
+        <p:spPr>
+          <a:xfrm>
+            <a:off x="11277295" y="6611112"/>
+            <a:ext cx="685800" cy="201168"/>
+          </a:xfrm>
+          <a:prstGeom prst="rect">
+            <a:avLst/>
+          </a:prstGeom>
+          <a:noFill/>
+        </p:spPr>
+        <p:txBody>
+          <a:bodyPr wrap="none" lIns="0" tIns="0" rIns="0" bIns="0" anchor="b">
+            <a:noAutofit/>
+          </a:bodyPr>
+          <a:lstStyle/>
+          <a:p>
+            <a:pPr algn="r"/>
+            <a:fld id="{5C1A6E0B-3B1F-4D5E-9C7A-2F4B8D6E1A90}" type="slidenum">
+              <a:rPr lang="en-US" sz="1200" dirty="0">
+                <a:solidFill>
+                  <a:srgbClr val="5F6272"/>
+                </a:solidFill>
+              </a:rPr>
+              <a:t>10</a:t>
+            </a:fld>
           </a:p>
         </p:txBody>
       </p:sp>
@@ -4029,6 +4097,40 @@
           </a:p>
         </p:txBody>
       </p:sp>
+      <p:sp>
+        <p:nvSpPr>
+          <p:cNvPr id="20" name="Slide Number 20"/>
+          <p:cNvSpPr txBox="1"/>
+          <p:nvPr/>
+        </p:nvSpPr>
+        <p:spPr>
+          <a:xfrm>
+            <a:off x="11277295" y="6611112"/>
+            <a:ext cx="685800" cy="201168"/>
+          </a:xfrm>
+          <a:prstGeom prst="rect">
+            <a:avLst/>
+          </a:prstGeom>
+          <a:noFill/>
+        </p:spPr>
+        <p:txBody>
+          <a:bodyPr wrap="none" lIns="0" tIns="0" rIns="0" bIns="0" anchor="b">
+            <a:noAutofit/>
+          </a:bodyPr>
+          <a:lstStyle/>
+          <a:p>
+            <a:pPr algn="r"/>
+            <a:fld id="{5C1A6E0B-3B1F-4D5E-9C7A-2F4B8D6E1A90}" type="slidenum">
+              <a:rPr lang="en-US" sz="1200" dirty="0">
+                <a:solidFill>
+                  <a:srgbClr val="5F6272"/>
+                </a:solidFill>
+              </a:rPr>
+              <a:t>11</a:t>
+            </a:fld>
+          </a:p>
+        </p:txBody>
+      </p:sp>
     </p:spTree>
   </p:cSld>
   <p:clrMapOvr>
@@ -5822,6 +5924,40 @@
           </a:p>
         </p:txBody>
       </p:sp>
+      <p:sp>
+        <p:nvSpPr>
+          <p:cNvPr id="41" name="Slide Number 41"/>
+          <p:cNvSpPr txBox="1"/>
+          <p:nvPr/>
+        </p:nvSpPr>
+        <p:spPr>
+          <a:xfrm>
+            <a:off x="11277295" y="6611112"/>
+            <a:ext cx="685800" cy="201168"/>
+          </a:xfrm>
+          <a:prstGeom prst="rect">
+            <a:avLst/>
+          </a:prstGeom>
+          <a:noFill/>
+        </p:spPr>
+        <p:txBody>
+          <a:bodyPr wrap="none" lIns="0" tIns="0" rIns="0" bIns="0" anchor="b">
+            <a:noAutofit/>
+          </a:bodyPr>
+          <a:lstStyle/>
+          <a:p>
+            <a:pPr algn="r"/>
+            <a:fld id="{5C1A6E0B-3B1F-4D5E-9C7A-2F4B8D6E1A90}" type="slidenum">
+              <a:rPr lang="en-US" sz="1200" dirty="0">
+                <a:solidFill>
+                  <a:srgbClr val="5F6272"/>
+                </a:solidFill>
+              </a:rPr>
+              <a:t>12</a:t>
+            </a:fld>
+          </a:p>
+        </p:txBody>
+      </p:sp>
     </p:spTree>
   </p:cSld>
   <p:clrMapOvr>
@@ -7158,6 +7294,40 @@
               <a:t xml:space="preserve">Answers vary: rate of change from two points; compare the slopes.</a:t>
             </a:r>
             <a:endParaRPr lang="en-US" sz="1575" dirty="0"/>
+          </a:p>
+        </p:txBody>
+      </p:sp>
+      <p:sp>
+        <p:nvSpPr>
+          <p:cNvPr id="22" name="Slide Number 22"/>
+          <p:cNvSpPr txBox="1"/>
+          <p:nvPr/>
+        </p:nvSpPr>
+        <p:spPr>
+          <a:xfrm>
+            <a:off x="11277295" y="6611112"/>
+            <a:ext cx="685800" cy="201168"/>
+          </a:xfrm>
+          <a:prstGeom prst="rect">
+            <a:avLst/>
+          </a:prstGeom>
+          <a:noFill/>
+        </p:spPr>
+        <p:txBody>
+          <a:bodyPr wrap="none" lIns="0" tIns="0" rIns="0" bIns="0" anchor="b">
+            <a:noAutofit/>
+          </a:bodyPr>
+          <a:lstStyle/>
+          <a:p>
+            <a:pPr algn="r"/>
+            <a:fld id="{5C1A6E0B-3B1F-4D5E-9C7A-2F4B8D6E1A90}" type="slidenum">
+              <a:rPr lang="en-US" sz="1200" dirty="0">
+                <a:solidFill>
+                  <a:srgbClr val="5F6272"/>
+                </a:solidFill>
+              </a:rPr>
+              <a:t>13</a:t>
+            </a:fld>
           </a:p>
         </p:txBody>
       </p:sp>
@@ -7905,6 +8075,40 @@
           </a:p>
         </p:txBody>
       </p:sp>
+      <p:sp>
+        <p:nvSpPr>
+          <p:cNvPr id="7" name="Slide Number 7"/>
+          <p:cNvSpPr txBox="1"/>
+          <p:nvPr/>
+        </p:nvSpPr>
+        <p:spPr>
+          <a:xfrm>
+            <a:off x="11277295" y="6611112"/>
+            <a:ext cx="685800" cy="201168"/>
+          </a:xfrm>
+          <a:prstGeom prst="rect">
+            <a:avLst/>
+          </a:prstGeom>
+          <a:noFill/>
+        </p:spPr>
+        <p:txBody>
+          <a:bodyPr wrap="none" lIns="0" tIns="0" rIns="0" bIns="0" anchor="b">
+            <a:noAutofit/>
+          </a:bodyPr>
+          <a:lstStyle/>
+          <a:p>
+            <a:pPr algn="r"/>
+            <a:fld id="{5C1A6E0B-3B1F-4D5E-9C7A-2F4B8D6E1A90}" type="slidenum">
+              <a:rPr lang="en-US" sz="1200" dirty="0">
+                <a:solidFill>
+                  <a:srgbClr val="5F6272"/>
+                </a:solidFill>
+              </a:rPr>
+              <a:t>14</a:t>
+            </a:fld>
+          </a:p>
+        </p:txBody>
+      </p:sp>
     </p:spTree>
   </p:cSld>
   <p:clrMapOvr>
@@ -8834,6 +9038,40 @@
           </a:p>
         </p:txBody>
       </p:sp>
+      <p:sp>
+        <p:nvSpPr>
+          <p:cNvPr id="10" name="Slide Number 10"/>
+          <p:cNvSpPr txBox="1"/>
+          <p:nvPr/>
+        </p:nvSpPr>
+        <p:spPr>
+          <a:xfrm>
+            <a:off x="11277295" y="6611112"/>
+            <a:ext cx="685800" cy="201168"/>
+          </a:xfrm>
+          <a:prstGeom prst="rect">
+            <a:avLst/>
+          </a:prstGeom>
+          <a:noFill/>
+        </p:spPr>
+        <p:txBody>
+          <a:bodyPr wrap="none" lIns="0" tIns="0" rIns="0" bIns="0" anchor="b">
+            <a:noAutofit/>
+          </a:bodyPr>
+          <a:lstStyle/>
+          <a:p>
+            <a:pPr algn="r"/>
+            <a:fld id="{5C1A6E0B-3B1F-4D5E-9C7A-2F4B8D6E1A90}" type="slidenum">
+              <a:rPr lang="en-US" sz="1200" dirty="0">
+                <a:solidFill>
+                  <a:srgbClr val="5F6272"/>
+                </a:solidFill>
+              </a:rPr>
+              <a:t>15</a:t>
+            </a:fld>
+          </a:p>
+        </p:txBody>
+      </p:sp>
     </p:spTree>
   </p:cSld>
   <p:clrMapOvr>
@@ -9832,6 +10070,40 @@
               <a:t xml:space="preserve"> = 13</a:t>
             </a:r>
             <a:endParaRPr lang="en-US" sz="2325" dirty="0"/>
+          </a:p>
+        </p:txBody>
+      </p:sp>
+      <p:sp>
+        <p:nvSpPr>
+          <p:cNvPr id="12" name="Slide Number 12"/>
+          <p:cNvSpPr txBox="1"/>
+          <p:nvPr/>
+        </p:nvSpPr>
+        <p:spPr>
+          <a:xfrm>
+            <a:off x="11277295" y="6611112"/>
+            <a:ext cx="685800" cy="201168"/>
+          </a:xfrm>
+          <a:prstGeom prst="rect">
+            <a:avLst/>
+          </a:prstGeom>
+          <a:noFill/>
+        </p:spPr>
+        <p:txBody>
+          <a:bodyPr wrap="none" lIns="0" tIns="0" rIns="0" bIns="0" anchor="b">
+            <a:noAutofit/>
+          </a:bodyPr>
+          <a:lstStyle/>
+          <a:p>
+            <a:pPr algn="r"/>
+            <a:fld id="{5C1A6E0B-3B1F-4D5E-9C7A-2F4B8D6E1A90}" type="slidenum">
+              <a:rPr lang="en-US" sz="1200" dirty="0">
+                <a:solidFill>
+                  <a:srgbClr val="5F6272"/>
+                </a:solidFill>
+              </a:rPr>
+              <a:t>16</a:t>
+            </a:fld>
           </a:p>
         </p:txBody>
       </p:sp>
@@ -10873,6 +11145,40 @@
           </a:p>
         </p:txBody>
       </p:sp>
+      <p:sp>
+        <p:nvSpPr>
+          <p:cNvPr id="15" name="Slide Number 15"/>
+          <p:cNvSpPr txBox="1"/>
+          <p:nvPr/>
+        </p:nvSpPr>
+        <p:spPr>
+          <a:xfrm>
+            <a:off x="11277295" y="6611112"/>
+            <a:ext cx="685800" cy="201168"/>
+          </a:xfrm>
+          <a:prstGeom prst="rect">
+            <a:avLst/>
+          </a:prstGeom>
+          <a:noFill/>
+        </p:spPr>
+        <p:txBody>
+          <a:bodyPr wrap="none" lIns="0" tIns="0" rIns="0" bIns="0" anchor="b">
+            <a:noAutofit/>
+          </a:bodyPr>
+          <a:lstStyle/>
+          <a:p>
+            <a:pPr algn="r"/>
+            <a:fld id="{5C1A6E0B-3B1F-4D5E-9C7A-2F4B8D6E1A90}" type="slidenum">
+              <a:rPr lang="en-US" sz="1200" dirty="0">
+                <a:solidFill>
+                  <a:srgbClr val="5F6272"/>
+                </a:solidFill>
+              </a:rPr>
+              <a:t>17</a:t>
+            </a:fld>
+          </a:p>
+        </p:txBody>
+      </p:sp>
     </p:spTree>
   </p:cSld>
   <p:clrMapOvr>
@@ -11594,6 +11900,40 @@
               <a:t xml:space="preserve">1</a:t>
             </a:r>
             <a:endParaRPr lang="en-US" sz="2325" dirty="0"/>
+          </a:p>
+        </p:txBody>
+      </p:sp>
+      <p:sp>
+        <p:nvSpPr>
+          <p:cNvPr id="12" name="Slide Number 12"/>
+          <p:cNvSpPr txBox="1"/>
+          <p:nvPr/>
+        </p:nvSpPr>
+        <p:spPr>
+          <a:xfrm>
+            <a:off x="11277295" y="6611112"/>
+            <a:ext cx="685800" cy="201168"/>
+          </a:xfrm>
+          <a:prstGeom prst="rect">
+            <a:avLst/>
+          </a:prstGeom>
+          <a:noFill/>
+        </p:spPr>
+        <p:txBody>
+          <a:bodyPr wrap="none" lIns="0" tIns="0" rIns="0" bIns="0" anchor="b">
+            <a:noAutofit/>
+          </a:bodyPr>
+          <a:lstStyle/>
+          <a:p>
+            <a:pPr algn="r"/>
+            <a:fld id="{5C1A6E0B-3B1F-4D5E-9C7A-2F4B8D6E1A90}" type="slidenum">
+              <a:rPr lang="en-US" sz="1200" dirty="0">
+                <a:solidFill>
+                  <a:srgbClr val="5F6272"/>
+                </a:solidFill>
+              </a:rPr>
+              <a:t>2</a:t>
+            </a:fld>
           </a:p>
         </p:txBody>
       </p:sp>
@@ -12271,6 +12611,40 @@
           </a:p>
         </p:txBody>
       </p:sp>
+      <p:sp>
+        <p:nvSpPr>
+          <p:cNvPr id="7" name="Slide Number 7"/>
+          <p:cNvSpPr txBox="1"/>
+          <p:nvPr/>
+        </p:nvSpPr>
+        <p:spPr>
+          <a:xfrm>
+            <a:off x="11277295" y="6611112"/>
+            <a:ext cx="685800" cy="201168"/>
+          </a:xfrm>
+          <a:prstGeom prst="rect">
+            <a:avLst/>
+          </a:prstGeom>
+          <a:noFill/>
+        </p:spPr>
+        <p:txBody>
+          <a:bodyPr wrap="none" lIns="0" tIns="0" rIns="0" bIns="0" anchor="b">
+            <a:noAutofit/>
+          </a:bodyPr>
+          <a:lstStyle/>
+          <a:p>
+            <a:pPr algn="r"/>
+            <a:fld id="{5C1A6E0B-3B1F-4D5E-9C7A-2F4B8D6E1A90}" type="slidenum">
+              <a:rPr lang="en-US" sz="1200" dirty="0">
+                <a:solidFill>
+                  <a:srgbClr val="5F6272"/>
+                </a:solidFill>
+              </a:rPr>
+              <a:t>3</a:t>
+            </a:fld>
+          </a:p>
+        </p:txBody>
+      </p:sp>
     </p:spTree>
   </p:cSld>
   <p:clrMapOvr>
@@ -12758,6 +13132,40 @@
           </a:p>
         </p:txBody>
       </p:sp>
+      <p:sp>
+        <p:nvSpPr>
+          <p:cNvPr id="5" name="Slide Number 5"/>
+          <p:cNvSpPr txBox="1"/>
+          <p:nvPr/>
+        </p:nvSpPr>
+        <p:spPr>
+          <a:xfrm>
+            <a:off x="11277295" y="6611112"/>
+            <a:ext cx="685800" cy="201168"/>
+          </a:xfrm>
+          <a:prstGeom prst="rect">
+            <a:avLst/>
+          </a:prstGeom>
+          <a:noFill/>
+        </p:spPr>
+        <p:txBody>
+          <a:bodyPr wrap="none" lIns="0" tIns="0" rIns="0" bIns="0" anchor="b">
+            <a:noAutofit/>
+          </a:bodyPr>
+          <a:lstStyle/>
+          <a:p>
+            <a:pPr algn="r"/>
+            <a:fld id="{5C1A6E0B-3B1F-4D5E-9C7A-2F4B8D6E1A90}" type="slidenum">
+              <a:rPr lang="en-US" sz="1200" dirty="0">
+                <a:solidFill>
+                  <a:srgbClr val="5F6272"/>
+                </a:solidFill>
+              </a:rPr>
+              <a:t>4</a:t>
+            </a:fld>
+          </a:p>
+        </p:txBody>
+      </p:sp>
     </p:spTree>
   </p:cSld>
   <p:clrMapOvr>
@@ -15383,6 +15791,40 @@
               <a:t xml:space="preserve">.</a:t>
             </a:r>
             <a:endParaRPr lang="en-US" sz="1575" dirty="0"/>
+          </a:p>
+        </p:txBody>
+      </p:sp>
+      <p:sp>
+        <p:nvSpPr>
+          <p:cNvPr id="68" name="Slide Number 68"/>
+          <p:cNvSpPr txBox="1"/>
+          <p:nvPr/>
+        </p:nvSpPr>
+        <p:spPr>
+          <a:xfrm>
+            <a:off x="11277295" y="6611112"/>
+            <a:ext cx="685800" cy="201168"/>
+          </a:xfrm>
+          <a:prstGeom prst="rect">
+            <a:avLst/>
+          </a:prstGeom>
+          <a:noFill/>
+        </p:spPr>
+        <p:txBody>
+          <a:bodyPr wrap="none" lIns="0" tIns="0" rIns="0" bIns="0" anchor="b">
+            <a:noAutofit/>
+          </a:bodyPr>
+          <a:lstStyle/>
+          <a:p>
+            <a:pPr algn="r"/>
+            <a:fld id="{5C1A6E0B-3B1F-4D5E-9C7A-2F4B8D6E1A90}" type="slidenum">
+              <a:rPr lang="en-US" sz="1200" dirty="0">
+                <a:solidFill>
+                  <a:srgbClr val="5F6272"/>
+                </a:solidFill>
+              </a:rPr>
+              <a:t>5</a:t>
+            </a:fld>
           </a:p>
         </p:txBody>
       </p:sp>
@@ -17040,6 +17482,40 @@
           </a:p>
         </p:txBody>
       </p:sp>
+      <p:sp>
+        <p:nvSpPr>
+          <p:cNvPr id="25" name="Slide Number 25"/>
+          <p:cNvSpPr txBox="1"/>
+          <p:nvPr/>
+        </p:nvSpPr>
+        <p:spPr>
+          <a:xfrm>
+            <a:off x="11277295" y="6611112"/>
+            <a:ext cx="685800" cy="201168"/>
+          </a:xfrm>
+          <a:prstGeom prst="rect">
+            <a:avLst/>
+          </a:prstGeom>
+          <a:noFill/>
+        </p:spPr>
+        <p:txBody>
+          <a:bodyPr wrap="none" lIns="0" tIns="0" rIns="0" bIns="0" anchor="b">
+            <a:noAutofit/>
+          </a:bodyPr>
+          <a:lstStyle/>
+          <a:p>
+            <a:pPr algn="r"/>
+            <a:fld id="{5C1A6E0B-3B1F-4D5E-9C7A-2F4B8D6E1A90}" type="slidenum">
+              <a:rPr lang="en-US" sz="1200" dirty="0">
+                <a:solidFill>
+                  <a:srgbClr val="5F6272"/>
+                </a:solidFill>
+              </a:rPr>
+              <a:t>6</a:t>
+            </a:fld>
+          </a:p>
+        </p:txBody>
+      </p:sp>
     </p:spTree>
   </p:cSld>
   <p:clrMapOvr>
@@ -19758,6 +20234,40 @@
           </a:p>
         </p:txBody>
       </p:sp>
+      <p:sp>
+        <p:nvSpPr>
+          <p:cNvPr id="72" name="Slide Number 72"/>
+          <p:cNvSpPr txBox="1"/>
+          <p:nvPr/>
+        </p:nvSpPr>
+        <p:spPr>
+          <a:xfrm>
+            <a:off x="11277295" y="6611112"/>
+            <a:ext cx="685800" cy="201168"/>
+          </a:xfrm>
+          <a:prstGeom prst="rect">
+            <a:avLst/>
+          </a:prstGeom>
+          <a:noFill/>
+        </p:spPr>
+        <p:txBody>
+          <a:bodyPr wrap="none" lIns="0" tIns="0" rIns="0" bIns="0" anchor="b">
+            <a:noAutofit/>
+          </a:bodyPr>
+          <a:lstStyle/>
+          <a:p>
+            <a:pPr algn="r"/>
+            <a:fld id="{5C1A6E0B-3B1F-4D5E-9C7A-2F4B8D6E1A90}" type="slidenum">
+              <a:rPr lang="en-US" sz="1200" dirty="0">
+                <a:solidFill>
+                  <a:srgbClr val="5F6272"/>
+                </a:solidFill>
+              </a:rPr>
+              <a:t>7</a:t>
+            </a:fld>
+          </a:p>
+        </p:txBody>
+      </p:sp>
     </p:spTree>
   </p:cSld>
   <p:clrMapOvr>
@@ -22416,6 +22926,40 @@
           </a:p>
         </p:txBody>
       </p:sp>
+      <p:sp>
+        <p:nvSpPr>
+          <p:cNvPr id="67" name="Slide Number 67"/>
+          <p:cNvSpPr txBox="1"/>
+          <p:nvPr/>
+        </p:nvSpPr>
+        <p:spPr>
+          <a:xfrm>
+            <a:off x="11277295" y="6611112"/>
+            <a:ext cx="685800" cy="201168"/>
+          </a:xfrm>
+          <a:prstGeom prst="rect">
+            <a:avLst/>
+          </a:prstGeom>
+          <a:noFill/>
+        </p:spPr>
+        <p:txBody>
+          <a:bodyPr wrap="none" lIns="0" tIns="0" rIns="0" bIns="0" anchor="b">
+            <a:noAutofit/>
+          </a:bodyPr>
+          <a:lstStyle/>
+          <a:p>
+            <a:pPr algn="r"/>
+            <a:fld id="{5C1A6E0B-3B1F-4D5E-9C7A-2F4B8D6E1A90}" type="slidenum">
+              <a:rPr lang="en-US" sz="1200" dirty="0">
+                <a:solidFill>
+                  <a:srgbClr val="5F6272"/>
+                </a:solidFill>
+              </a:rPr>
+              <a:t>8</a:t>
+            </a:fld>
+          </a:p>
+        </p:txBody>
+      </p:sp>
     </p:spTree>
   </p:cSld>
   <p:clrMapOvr>
@@ -22900,6 +23444,40 @@
               <a:t xml:space="preserve">Essential Question: How does each linear function representation compare with the others?</a:t>
             </a:r>
             <a:endParaRPr lang="en-US" sz="2400" dirty="0"/>
+          </a:p>
+        </p:txBody>
+      </p:sp>
+      <p:sp>
+        <p:nvSpPr>
+          <p:cNvPr id="5" name="Slide Number 5"/>
+          <p:cNvSpPr txBox="1"/>
+          <p:nvPr/>
+        </p:nvSpPr>
+        <p:spPr>
+          <a:xfrm>
+            <a:off x="11277295" y="6611112"/>
+            <a:ext cx="685800" cy="201168"/>
+          </a:xfrm>
+          <a:prstGeom prst="rect">
+            <a:avLst/>
+          </a:prstGeom>
+          <a:noFill/>
+        </p:spPr>
+        <p:txBody>
+          <a:bodyPr wrap="none" lIns="0" tIns="0" rIns="0" bIns="0" anchor="b">
+            <a:noAutofit/>
+          </a:bodyPr>
+          <a:lstStyle/>
+          <a:p>
+            <a:pPr algn="r"/>
+            <a:fld id="{5C1A6E0B-3B1F-4D5E-9C7A-2F4B8D6E1A90}" type="slidenum">
+              <a:rPr lang="en-US" sz="1200" dirty="0">
+                <a:solidFill>
+                  <a:srgbClr val="5F6272"/>
+                </a:solidFill>
+              </a:rPr>
+              <a:t>9</a:t>
+            </a:fld>
           </a:p>
         </p:txBody>
       </p:sp>

--- a/Module 2 topic 2/t2-lesson4-comparing-linear-functions.pptx
+++ b/Module 2 topic 2/t2-lesson4-comparing-linear-functions.pptx
@@ -233,7 +233,7 @@
           <a:p>
             <a:r>
               <a:rPr lang="en-US" dirty="0"/>
-              <a:t>Added for this deck; not from the textbook. Have this up as students walk in; they work silently while you take attendance (about 5 minutes). The same 4 questions are on the online Day 2 bell work. Reveal the answers one at a time. Answer key: 1. 15 · 3 = 45. 2. Slope = 20 ÷ 1 = 20 dollars per ton. 3. 9/5 · 10 + 32 = 18 + 32 = 50, so 10°C is 50°F. 4. 80 ÷ 4 = 20 dollars per month.</a:t>
+              <a:t>Added for this deck; not from the textbook. Have this up as students walk in; they work silently while you take attendance (about 5 minutes). The same 4 questions are on the online Day 2 bell work. Reveal the answers one at a time. Answer key: 1. 15 · 3 = 45. 2. Slope = 20 ÷ 1 = 20 dollars per ton. 3. 9/5 · 10 + 32 = 18 + 32 = 50, so 10°C is 50°F. 4. Range = the outputs, the gallons left: 200 at the start, down to 0 when t = 20.</a:t>
             </a:r>
           </a:p>
         </p:txBody>
@@ -705,7 +705,7 @@
           <a:p>
             <a:r>
               <a:rPr lang="en-US" dirty="0"/>
-              <a:t>Added for this deck; not from the textbook. Have this up as students walk in; they work silently while you take attendance (about 5 minutes). The same 4 questions are on the online Day 1 bell work. Reveal the answers one at a time. Answer key: 1. Slope = (4 − (−6)) ÷ (0 − (−2.5)) = 10 ÷ 2.5 = 4. 2. Parallel lines have equal slopes. 3. The negative reciprocal of 4 is −¼. 4. Equal numbers of each grade: y = x, slope 1.</a:t>
+              <a:t>Added for this deck; not from the textbook. Have this up as students walk in; they work silently while you take attendance (about 5 minutes). The same 4 questions are on the online Day 1 bell work. Reveal the answers one at a time. Answer key: 1. Slope = (4 − (−6)) ÷ (0 − (−2.5)) = 10 ÷ 2.5 = 4. 2. Parallel lines have equal slopes. 3. The negative reciprocal of 4 is −¼. 4. p has slope (4 − 1) ÷ 4 = ¾ = 0.75. y = x − 2 has slope 1, which is greater. (3x − 4y = 8 is y = ¾x − 2: equal, not greater.)</a:t>
             </a:r>
           </a:p>
         </p:txBody>
@@ -2534,7 +2534,7 @@
         <p:spPr>
           <a:xfrm>
             <a:off x="6362548" y="3243834"/>
-            <a:ext cx="5143348" cy="946404"/>
+            <a:ext cx="5143348" cy="1243584"/>
           </a:xfrm>
           <a:prstGeom prst="rect">
             <a:avLst/>
@@ -2563,7 +2563,67 @@
                 <a:latin typeface="Segoe UI"/>
                 <a:cs typeface="Segoe UI"/>
               </a:rPr>
-              <a:t xml:space="preserve">4. Miguel started with $0 and had $80 after 4 months. How much did he save each month? </a:t>
+              <a:t xml:space="preserve">4. A 200-gallon tank drains 10 gallons each minute: </a:t>
+            </a:r>
+            <a:r>
+              <a:rPr lang="en-US" sz="1950" dirty="0" i="1">
+                <a:solidFill>
+                  <a:srgbClr val="16171D"/>
+                </a:solidFill>
+                <a:latin typeface="Cambria"/>
+                <a:cs typeface="Cambria"/>
+              </a:rPr>
+              <a:t xml:space="preserve">w</a:t>
+            </a:r>
+            <a:r>
+              <a:rPr lang="en-US" sz="1950" dirty="0">
+                <a:solidFill>
+                  <a:srgbClr val="16171D"/>
+                </a:solidFill>
+                <a:latin typeface="Cambria"/>
+                <a:cs typeface="Cambria"/>
+              </a:rPr>
+              <a:t xml:space="preserve">(</a:t>
+            </a:r>
+            <a:r>
+              <a:rPr lang="en-US" sz="1950" dirty="0" i="1">
+                <a:solidFill>
+                  <a:srgbClr val="16171D"/>
+                </a:solidFill>
+                <a:latin typeface="Cambria"/>
+                <a:cs typeface="Cambria"/>
+              </a:rPr>
+              <a:t xml:space="preserve">t</a:t>
+            </a:r>
+            <a:r>
+              <a:rPr lang="en-US" sz="1950" dirty="0">
+                <a:solidFill>
+                  <a:srgbClr val="16171D"/>
+                </a:solidFill>
+                <a:latin typeface="Cambria"/>
+                <a:cs typeface="Cambria"/>
+              </a:rPr>
+              <a:t xml:space="preserve">) = 200 − 10</a:t>
+            </a:r>
+            <a:r>
+              <a:rPr lang="en-US" sz="1950" dirty="0" i="1">
+                <a:solidFill>
+                  <a:srgbClr val="16171D"/>
+                </a:solidFill>
+                <a:latin typeface="Cambria"/>
+                <a:cs typeface="Cambria"/>
+              </a:rPr>
+              <a:t xml:space="preserve">t</a:t>
+            </a:r>
+            <a:r>
+              <a:rPr lang="en-US" sz="1950" dirty="0">
+                <a:solidFill>
+                  <a:srgbClr val="16171D"/>
+                </a:solidFill>
+                <a:latin typeface="Segoe UI"/>
+                <a:cs typeface="Segoe UI"/>
+              </a:rPr>
+              <a:t xml:space="preserve">. What is the range of the function for this situation? </a:t>
             </a:r>
             <a:r>
               <a:rPr lang="en-US" sz="1575" dirty="0">
@@ -2573,7 +2633,7 @@
                 <a:latin typeface="Segoe UI"/>
                 <a:cs typeface="Segoe UI"/>
               </a:rPr>
-              <a:t xml:space="preserve">(SE p. 324)</a:t>
+              <a:t xml:space="preserve">(SE p. 325)</a:t>
             </a:r>
             <a:endParaRPr lang="en-US" sz="1950" dirty="0"/>
           </a:p>
@@ -2587,8 +2647,8 @@
         </p:nvSpPr>
         <p:spPr>
           <a:xfrm>
-            <a:off x="6362548" y="4323588"/>
-            <a:ext cx="2410541" cy="518922"/>
+            <a:off x="6362548" y="4620768"/>
+            <a:ext cx="4234632" cy="518922"/>
           </a:xfrm>
           <a:prstGeom prst="roundRect">
             <a:avLst>
@@ -2631,7 +2691,47 @@
                 <a:latin typeface="Cambria"/>
                 <a:cs typeface="Cambria"/>
               </a:rPr>
-              <a:t xml:space="preserve">$20</a:t>
+              <a:t xml:space="preserve">0 ≤ </a:t>
+            </a:r>
+            <a:r>
+              <a:rPr lang="en-US" sz="2325" dirty="0" i="1">
+                <a:solidFill>
+                  <a:srgbClr val="16171D"/>
+                </a:solidFill>
+                <a:latin typeface="Cambria"/>
+                <a:cs typeface="Cambria"/>
+              </a:rPr>
+              <a:t xml:space="preserve">w</a:t>
+            </a:r>
+            <a:r>
+              <a:rPr lang="en-US" sz="2325" dirty="0">
+                <a:solidFill>
+                  <a:srgbClr val="16171D"/>
+                </a:solidFill>
+                <a:latin typeface="Cambria"/>
+                <a:cs typeface="Cambria"/>
+              </a:rPr>
+              <a:t xml:space="preserve">(</a:t>
+            </a:r>
+            <a:r>
+              <a:rPr lang="en-US" sz="2325" dirty="0" i="1">
+                <a:solidFill>
+                  <a:srgbClr val="16171D"/>
+                </a:solidFill>
+                <a:latin typeface="Cambria"/>
+                <a:cs typeface="Cambria"/>
+              </a:rPr>
+              <a:t xml:space="preserve">t</a:t>
+            </a:r>
+            <a:r>
+              <a:rPr lang="en-US" sz="2325" dirty="0">
+                <a:solidFill>
+                  <a:srgbClr val="16171D"/>
+                </a:solidFill>
+                <a:latin typeface="Cambria"/>
+                <a:cs typeface="Cambria"/>
+              </a:rPr>
+              <a:t xml:space="preserve">) ≤ 200</a:t>
             </a:r>
             <a:endParaRPr lang="en-US" sz="2325" dirty="0"/>
           </a:p>
@@ -11809,17 +11909,17 @@
                 <a:latin typeface="Segoe UI"/>
                 <a:cs typeface="Segoe UI"/>
               </a:rPr>
-              <a:t xml:space="preserve">4. The ratio of 9th-graders to 10th-graders is </a:t>
-            </a:r>
-            <a:r>
-              <a:rPr lang="en-US" sz="1950" dirty="0">
+              <a:t xml:space="preserve">4. Function </a:t>
+            </a:r>
+            <a:r>
+              <a:rPr lang="en-US" sz="1950" dirty="0" i="1">
                 <a:solidFill>
                   <a:srgbClr val="16171D"/>
                 </a:solidFill>
                 <a:latin typeface="Cambria"/>
                 <a:cs typeface="Cambria"/>
               </a:rPr>
-              <a:t xml:space="preserve">1 : 1</a:t>
+              <a:t xml:space="preserve">p</a:t>
             </a:r>
             <a:r>
               <a:rPr lang="en-US" sz="1950" dirty="0">
@@ -11829,7 +11929,67 @@
                 <a:latin typeface="Segoe UI"/>
                 <a:cs typeface="Segoe UI"/>
               </a:rPr>
-              <a:t xml:space="preserve">. What is the slope of this relationship? </a:t>
+              <a:t xml:space="preserve"> passes through </a:t>
+            </a:r>
+            <a:r>
+              <a:rPr lang="en-US" sz="1950" dirty="0">
+                <a:solidFill>
+                  <a:srgbClr val="16171D"/>
+                </a:solidFill>
+                <a:latin typeface="Cambria"/>
+                <a:cs typeface="Cambria"/>
+              </a:rPr>
+              <a:t xml:space="preserve">(0, 1)</a:t>
+            </a:r>
+            <a:r>
+              <a:rPr lang="en-US" sz="1950" dirty="0">
+                <a:solidFill>
+                  <a:srgbClr val="16171D"/>
+                </a:solidFill>
+                <a:latin typeface="Segoe UI"/>
+                <a:cs typeface="Segoe UI"/>
+              </a:rPr>
+              <a:t xml:space="preserve"> and </a:t>
+            </a:r>
+            <a:r>
+              <a:rPr lang="en-US" sz="1950" dirty="0">
+                <a:solidFill>
+                  <a:srgbClr val="16171D"/>
+                </a:solidFill>
+                <a:latin typeface="Cambria"/>
+                <a:cs typeface="Cambria"/>
+              </a:rPr>
+              <a:t xml:space="preserve">(4, 4)</a:t>
+            </a:r>
+            <a:r>
+              <a:rPr lang="en-US" sz="1950" dirty="0">
+                <a:solidFill>
+                  <a:srgbClr val="16171D"/>
+                </a:solidFill>
+                <a:latin typeface="Segoe UI"/>
+                <a:cs typeface="Segoe UI"/>
+              </a:rPr>
+              <a:t xml:space="preserve">. Which function has a greater rate of change than function </a:t>
+            </a:r>
+            <a:r>
+              <a:rPr lang="en-US" sz="1950" dirty="0" i="1">
+                <a:solidFill>
+                  <a:srgbClr val="16171D"/>
+                </a:solidFill>
+                <a:latin typeface="Cambria"/>
+                <a:cs typeface="Cambria"/>
+              </a:rPr>
+              <a:t xml:space="preserve">p</a:t>
+            </a:r>
+            <a:r>
+              <a:rPr lang="en-US" sz="1950" dirty="0">
+                <a:solidFill>
+                  <a:srgbClr val="16171D"/>
+                </a:solidFill>
+                <a:latin typeface="Segoe UI"/>
+                <a:cs typeface="Segoe UI"/>
+              </a:rPr>
+              <a:t xml:space="preserve">? </a:t>
             </a:r>
             <a:r>
               <a:rPr lang="en-US" sz="1575" dirty="0">
@@ -11839,7 +11999,7 @@
                 <a:latin typeface="Segoe UI"/>
                 <a:cs typeface="Segoe UI"/>
               </a:rPr>
-              <a:t xml:space="preserve">(SE p. 320)</a:t>
+              <a:t xml:space="preserve">(SE p. 325)</a:t>
             </a:r>
             <a:endParaRPr lang="en-US" sz="1950" dirty="0"/>
           </a:p>
@@ -11854,7 +12014,7 @@
         <p:spPr>
           <a:xfrm>
             <a:off x="6362548" y="4323588"/>
-            <a:ext cx="2078888" cy="518922"/>
+            <a:ext cx="3405500" cy="518922"/>
           </a:xfrm>
           <a:prstGeom prst="roundRect">
             <a:avLst>
@@ -11890,14 +12050,44 @@
               <a:t xml:space="preserve">ANSWER   </a:t>
             </a:r>
             <a:r>
-              <a:rPr lang="en-US" sz="2325" dirty="0">
+              <a:rPr lang="en-US" sz="2325" dirty="0" i="1">
                 <a:solidFill>
                   <a:srgbClr val="16171D"/>
                 </a:solidFill>
                 <a:latin typeface="Cambria"/>
                 <a:cs typeface="Cambria"/>
               </a:rPr>
-              <a:t xml:space="preserve">1</a:t>
+              <a:t xml:space="preserve">y</a:t>
+            </a:r>
+            <a:r>
+              <a:rPr lang="en-US" sz="2325" dirty="0">
+                <a:solidFill>
+                  <a:srgbClr val="16171D"/>
+                </a:solidFill>
+                <a:latin typeface="Cambria"/>
+                <a:cs typeface="Cambria"/>
+              </a:rPr>
+              <a:t xml:space="preserve"> = </a:t>
+            </a:r>
+            <a:r>
+              <a:rPr lang="en-US" sz="2325" dirty="0" i="1">
+                <a:solidFill>
+                  <a:srgbClr val="16171D"/>
+                </a:solidFill>
+                <a:latin typeface="Cambria"/>
+                <a:cs typeface="Cambria"/>
+              </a:rPr>
+              <a:t xml:space="preserve">x</a:t>
+            </a:r>
+            <a:r>
+              <a:rPr lang="en-US" sz="2325" dirty="0">
+                <a:solidFill>
+                  <a:srgbClr val="16171D"/>
+                </a:solidFill>
+                <a:latin typeface="Cambria"/>
+                <a:cs typeface="Cambria"/>
+              </a:rPr>
+              <a:t xml:space="preserve"> − 2</a:t>
             </a:r>
             <a:endParaRPr lang="en-US" sz="2325" dirty="0"/>
           </a:p>

--- a/Module 2 topic 2/t2-lesson4-comparing-linear-functions.pptx
+++ b/Module 2 topic 2/t2-lesson4-comparing-linear-functions.pptx
@@ -174,7 +174,7 @@
           <a:p>
             <a:r>
               <a:rPr lang="en-US" dirty="0"/>
-              <a:t>Students compare linear functions given as tables, graphs, equations and verbal descriptions: slope (parallel or perpendicular), y-intercept, and the units and scales in context. Two days on the 150-day calendar: Day 1 Getting Started, Activities 4.1 and 4.2; Day 2 Activities 4.3, 4.4 and Talk the Talk.</a:t>
+              <a:t>Students compare linear functions given as tables, graphs, equations and verbal descriptions: slope (parallel or perpendicular), y-intercept, and the units and scales in context. The 150-day guide omits this lesson, but the End of Topic 2 Assessment covers it (questions 11–14). On the class calendar: Day 1 (Mon Nov 2, review day) Getting Started, Activities 4.1 and 4.2, then the online Topic 2 Review practice test; Day 2 (Wed Nov 4, after the test, for students not retaking) Activities 4.3, 4.4 and Talk the Talk.</a:t>
             </a:r>
           </a:p>
         </p:txBody>

--- a/Module 2 topic 2/t2-lesson4-comparing-linear-functions.pptx
+++ b/Module 2 topic 2/t2-lesson4-comparing-linear-functions.pptx
@@ -174,7 +174,7 @@
           <a:p>
             <a:r>
               <a:rPr lang="en-US" dirty="0"/>
-              <a:t>Students compare linear functions given as tables, graphs, equations and verbal descriptions: slope (parallel or perpendicular), y-intercept, and the units and scales in context. The 150-day guide omits this lesson, but the End of Topic 2 Assessment covers it (questions 11–14). On the class calendar: Day 1 (Mon Nov 2, review day) Getting Started, Activities 4.1 and 4.2, then the online Topic 2 Review practice test; Day 2 (Wed Nov 4, after the test, for students not retaking) Activities 4.3, 4.4 and Talk the Talk.</a:t>
+              <a:t>Students compare linear functions given as tables, graphs, equations and verbal descriptions: slope (parallel or perpendicular), y-intercept, and the units and scales in context. The 150-day guide omits this lesson, but the End of Topic 2 Assessment covers it (questions 11–14). On the class calendar: Day 1 (Thu Oct 29) Getting Started, Activities 4.1 and 4.2, plus the rate of change and starting value of Activity 4.4 if time allows; Day 2 (Wed Nov 4, after the test, for students not retaking) Activities 4.3, 4.4 and Talk the Talk.</a:t>
             </a:r>
           </a:p>
         </p:txBody>
